--- a/classes/parte-16-capstones-y-preparacion-de-certificaciones/301-roadmap-de-certificaciones-comptia-oscp-cissp-y-mas/clase-301-presentacion.pptx
+++ b/classes/parte-16-capstones-y-preparacion-de-certificaciones/301-roadmap-de-certificaciones-comptia-oscp-cissp-y-mas/clase-301-presentacion.pptx
@@ -17,6 +17,10 @@
     <p:sldId id="265" r:id="rId16"/>
     <p:sldId id="266" r:id="rId17"/>
     <p:sldId id="267" r:id="rId18"/>
+    <p:sldId id="268" r:id="rId19"/>
+    <p:sldId id="269" r:id="rId20"/>
+    <p:sldId id="270" r:id="rId21"/>
+    <p:sldId id="271" r:id="rId22"/>
   </p:sldIdLst>
   <p:sldSz cx="9144000" cy="6858000" type="screen4x3"/>
   <p:notesSz cx="6858000" cy="9144000"/>
@@ -3198,7 +3202,7 @@
                   <a:srgbClr val="0B3D2E"/>
                 </a:solidFill>
               </a:rPr>
-              <a:t>⚠️ Errores comunes</a:t>
+              <a:t>🧪 Laboratorio guiado (ejercicio aplicado)</a:t>
             </a:r>
           </a:p>
         </p:txBody>
@@ -3236,67 +3240,97 @@
                   <a:srgbClr val="22282E"/>
                 </a:solidFill>
               </a:rPr>
-              <a:t>•  "Voy directo al OSCP sin base" — Falta de fundamentos; refuerza Partes 6–9 y haz eJPT antes.</a:t>
-            </a:r>
-          </a:p>
-          <a:p>
-            <a:pPr>
-              <a:spcAft>
-                <a:spcPts val="600"/>
-              </a:spcAft>
-            </a:pPr>
-            <a:r>
-              <a:rPr sz="1500">
-                <a:solidFill>
-                  <a:srgbClr val="22282E"/>
-                </a:solidFill>
-              </a:rPr>
-              <a:t>•  "El CISSP me rechazó el endorsement" — No cumples 5 años de experiencia; quedas como Associate hasta acumularla.</a:t>
-            </a:r>
-          </a:p>
-          <a:p>
-            <a:pPr>
-              <a:spcAft>
-                <a:spcPts val="600"/>
-              </a:spcAft>
-            </a:pPr>
-            <a:r>
-              <a:rPr sz="1500">
-                <a:solidFill>
-                  <a:srgbClr val="22282E"/>
-                </a:solidFill>
-              </a:rPr>
-              <a:t>•  "Mi certificación caducó" — No registraste CEUs; agenda formación continua desde el día 1.</a:t>
-            </a:r>
-          </a:p>
-          <a:p>
-            <a:pPr>
-              <a:spcAft>
-                <a:spcPts val="600"/>
-              </a:spcAft>
-            </a:pPr>
-            <a:r>
-              <a:rPr sz="1500">
-                <a:solidFill>
-                  <a:srgbClr val="22282E"/>
-                </a:solidFill>
-              </a:rPr>
-              <a:t>•  "Gasté de más en materiales" — Compraste cursos redundantes; prioriza el material oficial y labs.</a:t>
-            </a:r>
-          </a:p>
-          <a:p>
-            <a:pPr>
-              <a:spcAft>
-                <a:spcPts val="600"/>
-              </a:spcAft>
-            </a:pPr>
-            <a:r>
-              <a:rPr sz="1500">
-                <a:solidFill>
-                  <a:srgbClr val="22282E"/>
-                </a:solidFill>
-              </a:rPr>
-              <a:t>•  "Elegí una cert que no pide mi mercado" — No investigaste ofertas locales; revisa vacantes reales de tu región.</a:t>
+              <a:t>•  Autoevaluación de perfil. Responde: ¿te atrae más romper (ofensivo), defender (defensivo) o gobernar (GRC)? Anota tu objetivo de rol a 24 meses (p. ej. "Pentester junior", "Analista SOC", "GRC…</a:t>
+            </a:r>
+          </a:p>
+          <a:p>
+            <a:pPr>
+              <a:spcAft>
+                <a:spcPts val="600"/>
+              </a:spcAft>
+            </a:pPr>
+            <a:r>
+              <a:rPr sz="1500">
+                <a:solidFill>
+                  <a:srgbClr val="22282E"/>
+                </a:solidFill>
+              </a:rPr>
+              <a:t>•  Inventario de base. Marca en una tabla qué partes del programa cubres bien. Ejemplo: Partes 6–9 fuertes → perfil ofensivo maduro.</a:t>
+            </a:r>
+          </a:p>
+          <a:p>
+            <a:pPr>
+              <a:spcAft>
+                <a:spcPts val="600"/>
+              </a:spcAft>
+            </a:pPr>
+            <a:r>
+              <a:rPr sz="1500">
+                <a:solidFill>
+                  <a:srgbClr val="22282E"/>
+                </a:solidFill>
+              </a:rPr>
+              <a:t>•  Selecciona la secuencia base. Si partes de cero laboral, empieza por Security+ (valida Partes 1–5). Si ya tienes base sólida, puedes saltar a la vía especializada.</a:t>
+            </a:r>
+          </a:p>
+          <a:p>
+            <a:pPr>
+              <a:spcAft>
+                <a:spcPts val="600"/>
+              </a:spcAft>
+            </a:pPr>
+            <a:r>
+              <a:rPr sz="1500">
+                <a:solidFill>
+                  <a:srgbClr val="22282E"/>
+                </a:solidFill>
+              </a:rPr>
+              <a:t>•  Define la vía especializada:</a:t>
+            </a:r>
+          </a:p>
+          <a:p>
+            <a:pPr>
+              <a:spcAft>
+                <a:spcPts val="600"/>
+              </a:spcAft>
+            </a:pPr>
+            <a:r>
+              <a:rPr sz="1500">
+                <a:solidFill>
+                  <a:srgbClr val="22282E"/>
+                </a:solidFill>
+              </a:rPr>
+              <a:t>•  Ofensiva: eJPT → OSCP → OSEP/OSWE (apoyada en Partes 6–9).</a:t>
+            </a:r>
+          </a:p>
+          <a:p>
+            <a:pPr>
+              <a:spcAft>
+                <a:spcPts val="600"/>
+              </a:spcAft>
+            </a:pPr>
+            <a:r>
+              <a:rPr sz="1500">
+                <a:solidFill>
+                  <a:srgbClr val="22282E"/>
+                </a:solidFill>
+              </a:rPr>
+              <a:t>•  Defensiva: CySA+ → GCIH/GCFA (apoyada en Partes 10–13).</a:t>
+            </a:r>
+          </a:p>
+          <a:p>
+            <a:pPr>
+              <a:spcAft>
+                <a:spcPts val="600"/>
+              </a:spcAft>
+            </a:pPr>
+            <a:r>
+              <a:rPr sz="1500">
+                <a:solidFill>
+                  <a:srgbClr val="22282E"/>
+                </a:solidFill>
+              </a:rPr>
+              <a:t>•  Gestión: CISSP (requiere 5 años de experiencia; apoyada transversalmente).</a:t>
             </a:r>
           </a:p>
         </p:txBody>
@@ -3347,7 +3381,7 @@
                   <a:srgbClr val="0B3D2E"/>
                 </a:solidFill>
               </a:rPr>
-              <a:t>❓ Preguntas frecuentes</a:t>
+              <a:t>✍️ Ejercicios</a:t>
             </a:r>
           </a:p>
         </p:txBody>
@@ -3385,97 +3419,82 @@
                   <a:srgbClr val="22282E"/>
                 </a:solidFill>
               </a:rPr>
-              <a:t>•  ❓ ¿Security+ o directamente OSCP?</a:t>
-            </a:r>
-          </a:p>
-          <a:p>
-            <a:pPr>
-              <a:spcAft>
-                <a:spcPts val="600"/>
-              </a:spcAft>
-            </a:pPr>
-            <a:r>
-              <a:rPr sz="1500">
-                <a:solidFill>
-                  <a:srgbClr val="22282E"/>
-                </a:solidFill>
-              </a:rPr>
-              <a:t>•  Si buscas empleo pronto o cumples requisitos DoD, Security+ primero. Si ya tienes base técnica sólida y buscas rol ofensivo, puedes ir a por OSCP tras un puente como eJPT.</a:t>
-            </a:r>
-          </a:p>
-          <a:p>
-            <a:pPr>
-              <a:spcAft>
-                <a:spcPts val="600"/>
-              </a:spcAft>
-            </a:pPr>
-            <a:r>
-              <a:rPr sz="1500">
-                <a:solidFill>
-                  <a:srgbClr val="22282E"/>
-                </a:solidFill>
-              </a:rPr>
-              <a:t>•  ❓ ¿El CISSP sirve sin experiencia?</a:t>
-            </a:r>
-          </a:p>
-          <a:p>
-            <a:pPr>
-              <a:spcAft>
-                <a:spcPts val="600"/>
-              </a:spcAft>
-            </a:pPr>
-            <a:r>
-              <a:rPr sz="1500">
-                <a:solidFill>
-                  <a:srgbClr val="22282E"/>
-                </a:solidFill>
-              </a:rPr>
-              <a:t>•  Puedes aprobar el examen, pero sin 5 años de experiencia serás Associate of (ISC)² hasta cumplirlos.</a:t>
-            </a:r>
-          </a:p>
-          <a:p>
-            <a:pPr>
-              <a:spcAft>
-                <a:spcPts val="600"/>
-              </a:spcAft>
-            </a:pPr>
-            <a:r>
-              <a:rPr sz="1500">
-                <a:solidFill>
-                  <a:srgbClr val="22282E"/>
-                </a:solidFill>
-              </a:rPr>
-              <a:t>•  ❓ ¿Cuánto se tarda en el OSCP?</a:t>
-            </a:r>
-          </a:p>
-          <a:p>
-            <a:pPr>
-              <a:spcAft>
-                <a:spcPts val="600"/>
-              </a:spcAft>
-            </a:pPr>
-            <a:r>
-              <a:rPr sz="1500">
-                <a:solidFill>
-                  <a:srgbClr val="22282E"/>
-                </a:solidFill>
-              </a:rPr>
-              <a:t>•  Con base previa, 3–6 meses de práctica intensiva. Sin base, más. Depende de tu dominio de las Partes 6–9.</a:t>
-            </a:r>
-          </a:p>
-          <a:p>
-            <a:pPr>
-              <a:spcAft>
-                <a:spcPts val="600"/>
-              </a:spcAft>
-            </a:pPr>
-            <a:r>
-              <a:rPr sz="1500">
-                <a:solidFill>
-                  <a:srgbClr val="22282E"/>
-                </a:solidFill>
-              </a:rPr>
-              <a:t>•  ❓ ¿Las certificaciones caducan?</a:t>
+              <a:t>•  Construye una tabla de 8 certificaciones con: dominio, nivel, tipo de examen y vigencia.</a:t>
+            </a:r>
+          </a:p>
+          <a:p>
+            <a:pPr>
+              <a:spcAft>
+                <a:spcPts val="600"/>
+              </a:spcAft>
+            </a:pPr>
+            <a:r>
+              <a:rPr sz="1500">
+                <a:solidFill>
+                  <a:srgbClr val="22282E"/>
+                </a:solidFill>
+              </a:rPr>
+              <a:t>•  Ordena tres rutas (ofensiva, defensiva, GRC) de menor a mayor dificultad.</a:t>
+            </a:r>
+          </a:p>
+          <a:p>
+            <a:pPr>
+              <a:spcAft>
+                <a:spcPts val="600"/>
+              </a:spcAft>
+            </a:pPr>
+            <a:r>
+              <a:rPr sz="1500">
+                <a:solidFill>
+                  <a:srgbClr val="22282E"/>
+                </a:solidFill>
+              </a:rPr>
+              <a:t>•  Calcula el presupuesto total de tu vía elegida a 24 meses.</a:t>
+            </a:r>
+          </a:p>
+          <a:p>
+            <a:pPr>
+              <a:spcAft>
+                <a:spcPts val="600"/>
+              </a:spcAft>
+            </a:pPr>
+            <a:r>
+              <a:rPr sz="1500">
+                <a:solidFill>
+                  <a:srgbClr val="22282E"/>
+                </a:solidFill>
+              </a:rPr>
+              <a:t>•  Mapea cada certificación de tu ruta a las partes del programa que la sustentan.</a:t>
+            </a:r>
+          </a:p>
+          <a:p>
+            <a:pPr>
+              <a:spcAft>
+                <a:spcPts val="600"/>
+              </a:spcAft>
+            </a:pPr>
+            <a:r>
+              <a:rPr sz="1500">
+                <a:solidFill>
+                  <a:srgbClr val="22282E"/>
+                </a:solidFill>
+              </a:rPr>
+              <a:t>•  Identifica dos certificaciones cloud y a qué rol apuntan.</a:t>
+            </a:r>
+          </a:p>
+          <a:p>
+            <a:pPr>
+              <a:spcAft>
+                <a:spcPts val="600"/>
+              </a:spcAft>
+            </a:pPr>
+            <a:r>
+              <a:rPr sz="1500">
+                <a:solidFill>
+                  <a:srgbClr val="22282E"/>
+                </a:solidFill>
+              </a:rPr>
+              <a:t>•  Redacta un párrafo justificando por qué tu primera certificación es la correcta para ti.</a:t>
             </a:r>
           </a:p>
         </p:txBody>
@@ -3526,7 +3545,7 @@
                   <a:srgbClr val="0B3D2E"/>
                 </a:solidFill>
               </a:rPr>
-              <a:t>🔗 Referencias</a:t>
+              <a:t>📝 Reto verificable</a:t>
             </a:r>
           </a:p>
         </p:txBody>
@@ -3564,6 +3583,438 @@
                   <a:srgbClr val="22282E"/>
                 </a:solidFill>
               </a:rPr>
+              <a:t>•  Entrega un documento roadmap-certificaciones.md con: (a) tu objetivo de rol a 24 meses, (b) una secuencia ordenada de 3–5 certificaciones con fechas trimestrales, (c) presupuesto total y (d) el mapeo…</a:t>
+            </a:r>
+          </a:p>
+          <a:p>
+            <a:pPr>
+              <a:spcAft>
+                <a:spcPts val="600"/>
+              </a:spcAft>
+            </a:pPr>
+            <a:r>
+              <a:rPr sz="1500">
+                <a:solidFill>
+                  <a:srgbClr val="22282E"/>
+                </a:solidFill>
+              </a:rPr>
+              <a:t>•  Criterio de aceptación: el roadmap tiene fechas concretas, la secuencia no salta niveles (no pones OSCP antes de tener base de Partes 6–8) y cada credencial está justificada con su parte de sustento.</a:t>
+            </a:r>
+          </a:p>
+        </p:txBody>
+      </p:sp>
+    </p:spTree>
+  </p:cSld>
+  <p:clrMapOvr>
+    <a:masterClrMapping/>
+  </p:clrMapOvr>
+</p:sld>
+</file>
+
+<file path=ppt/slides/slide13.xml><?xml version="1.0" encoding="utf-8"?>
+<p:sld xmlns:a="http://schemas.openxmlformats.org/drawingml/2006/main" xmlns:p="http://schemas.openxmlformats.org/presentationml/2006/main" xmlns:r="http://schemas.openxmlformats.org/officeDocument/2006/relationships">
+  <p:cSld>
+    <p:spTree>
+      <p:nvGrpSpPr>
+        <p:cNvPr id="1" name=""/>
+        <p:cNvGrpSpPr/>
+        <p:nvPr/>
+      </p:nvGrpSpPr>
+      <p:grpSpPr/>
+      <p:sp>
+        <p:nvSpPr>
+          <p:cNvPr id="2" name="TextBox 1"/>
+          <p:cNvSpPr txBox="1"/>
+          <p:nvPr/>
+        </p:nvSpPr>
+        <p:spPr>
+          <a:xfrm>
+            <a:off x="457200" y="320040"/>
+            <a:ext cx="8229600" cy="822960"/>
+          </a:xfrm>
+          <a:prstGeom prst="rect">
+            <a:avLst/>
+          </a:prstGeom>
+          <a:noFill/>
+        </p:spPr>
+        <p:txBody>
+          <a:bodyPr wrap="square">
+            <a:spAutoFit/>
+          </a:bodyPr>
+          <a:lstStyle/>
+          <a:p>
+            <a:r>
+              <a:rPr sz="2600" b="1">
+                <a:solidFill>
+                  <a:srgbClr val="0B3D2E"/>
+                </a:solidFill>
+              </a:rPr>
+              <a:t>⚠️ Errores comunes</a:t>
+            </a:r>
+          </a:p>
+        </p:txBody>
+      </p:sp>
+      <p:sp>
+        <p:nvSpPr>
+          <p:cNvPr id="3" name="TextBox 2"/>
+          <p:cNvSpPr txBox="1"/>
+          <p:nvPr/>
+        </p:nvSpPr>
+        <p:spPr>
+          <a:xfrm>
+            <a:off x="457200" y="1280160"/>
+            <a:ext cx="8229600" cy="4937760"/>
+          </a:xfrm>
+          <a:prstGeom prst="rect">
+            <a:avLst/>
+          </a:prstGeom>
+          <a:noFill/>
+        </p:spPr>
+        <p:txBody>
+          <a:bodyPr wrap="square">
+            <a:spAutoFit/>
+          </a:bodyPr>
+          <a:lstStyle/>
+          <a:p>
+            <a:pPr>
+              <a:spcAft>
+                <a:spcPts val="600"/>
+              </a:spcAft>
+            </a:pPr>
+            <a:r>
+              <a:rPr sz="1500">
+                <a:solidFill>
+                  <a:srgbClr val="22282E"/>
+                </a:solidFill>
+              </a:rPr>
+              <a:t>•  "Voy directo al OSCP sin base" — Falta de fundamentos; refuerza Partes 6–9 y haz eJPT antes.</a:t>
+            </a:r>
+          </a:p>
+          <a:p>
+            <a:pPr>
+              <a:spcAft>
+                <a:spcPts val="600"/>
+              </a:spcAft>
+            </a:pPr>
+            <a:r>
+              <a:rPr sz="1500">
+                <a:solidFill>
+                  <a:srgbClr val="22282E"/>
+                </a:solidFill>
+              </a:rPr>
+              <a:t>•  "El CISSP me rechazó el endorsement" — No cumples 5 años de experiencia; quedas como Associate hasta acumularla.</a:t>
+            </a:r>
+          </a:p>
+          <a:p>
+            <a:pPr>
+              <a:spcAft>
+                <a:spcPts val="600"/>
+              </a:spcAft>
+            </a:pPr>
+            <a:r>
+              <a:rPr sz="1500">
+                <a:solidFill>
+                  <a:srgbClr val="22282E"/>
+                </a:solidFill>
+              </a:rPr>
+              <a:t>•  "Mi certificación caducó" — No registraste CEUs; agenda formación continua desde el día 1.</a:t>
+            </a:r>
+          </a:p>
+          <a:p>
+            <a:pPr>
+              <a:spcAft>
+                <a:spcPts val="600"/>
+              </a:spcAft>
+            </a:pPr>
+            <a:r>
+              <a:rPr sz="1500">
+                <a:solidFill>
+                  <a:srgbClr val="22282E"/>
+                </a:solidFill>
+              </a:rPr>
+              <a:t>•  "Gasté de más en materiales" — Compraste cursos redundantes; prioriza el material oficial y labs.</a:t>
+            </a:r>
+          </a:p>
+          <a:p>
+            <a:pPr>
+              <a:spcAft>
+                <a:spcPts val="600"/>
+              </a:spcAft>
+            </a:pPr>
+            <a:r>
+              <a:rPr sz="1500">
+                <a:solidFill>
+                  <a:srgbClr val="22282E"/>
+                </a:solidFill>
+              </a:rPr>
+              <a:t>•  "Elegí una cert que no pide mi mercado" — No investigaste ofertas locales; revisa vacantes reales de tu región.</a:t>
+            </a:r>
+          </a:p>
+        </p:txBody>
+      </p:sp>
+    </p:spTree>
+  </p:cSld>
+  <p:clrMapOvr>
+    <a:masterClrMapping/>
+  </p:clrMapOvr>
+</p:sld>
+</file>
+
+<file path=ppt/slides/slide14.xml><?xml version="1.0" encoding="utf-8"?>
+<p:sld xmlns:a="http://schemas.openxmlformats.org/drawingml/2006/main" xmlns:p="http://schemas.openxmlformats.org/presentationml/2006/main" xmlns:r="http://schemas.openxmlformats.org/officeDocument/2006/relationships">
+  <p:cSld>
+    <p:spTree>
+      <p:nvGrpSpPr>
+        <p:cNvPr id="1" name=""/>
+        <p:cNvGrpSpPr/>
+        <p:nvPr/>
+      </p:nvGrpSpPr>
+      <p:grpSpPr/>
+      <p:sp>
+        <p:nvSpPr>
+          <p:cNvPr id="2" name="TextBox 1"/>
+          <p:cNvSpPr txBox="1"/>
+          <p:nvPr/>
+        </p:nvSpPr>
+        <p:spPr>
+          <a:xfrm>
+            <a:off x="457200" y="320040"/>
+            <a:ext cx="8229600" cy="822960"/>
+          </a:xfrm>
+          <a:prstGeom prst="rect">
+            <a:avLst/>
+          </a:prstGeom>
+          <a:noFill/>
+        </p:spPr>
+        <p:txBody>
+          <a:bodyPr wrap="square">
+            <a:spAutoFit/>
+          </a:bodyPr>
+          <a:lstStyle/>
+          <a:p>
+            <a:r>
+              <a:rPr sz="2600" b="1">
+                <a:solidFill>
+                  <a:srgbClr val="0B3D2E"/>
+                </a:solidFill>
+              </a:rPr>
+              <a:t>❓ Preguntas frecuentes</a:t>
+            </a:r>
+          </a:p>
+        </p:txBody>
+      </p:sp>
+      <p:sp>
+        <p:nvSpPr>
+          <p:cNvPr id="3" name="TextBox 2"/>
+          <p:cNvSpPr txBox="1"/>
+          <p:nvPr/>
+        </p:nvSpPr>
+        <p:spPr>
+          <a:xfrm>
+            <a:off x="457200" y="1280160"/>
+            <a:ext cx="8229600" cy="4937760"/>
+          </a:xfrm>
+          <a:prstGeom prst="rect">
+            <a:avLst/>
+          </a:prstGeom>
+          <a:noFill/>
+        </p:spPr>
+        <p:txBody>
+          <a:bodyPr wrap="square">
+            <a:spAutoFit/>
+          </a:bodyPr>
+          <a:lstStyle/>
+          <a:p>
+            <a:pPr>
+              <a:spcAft>
+                <a:spcPts val="600"/>
+              </a:spcAft>
+            </a:pPr>
+            <a:r>
+              <a:rPr sz="1500">
+                <a:solidFill>
+                  <a:srgbClr val="22282E"/>
+                </a:solidFill>
+              </a:rPr>
+              <a:t>•  ❓ ¿Security+ o directamente OSCP?</a:t>
+            </a:r>
+          </a:p>
+          <a:p>
+            <a:pPr>
+              <a:spcAft>
+                <a:spcPts val="600"/>
+              </a:spcAft>
+            </a:pPr>
+            <a:r>
+              <a:rPr sz="1500">
+                <a:solidFill>
+                  <a:srgbClr val="22282E"/>
+                </a:solidFill>
+              </a:rPr>
+              <a:t>•  Si buscas empleo pronto o cumples requisitos DoD, Security+ primero. Si ya tienes base técnica sólida y buscas rol ofensivo, puedes ir a por OSCP tras un puente como eJPT.</a:t>
+            </a:r>
+          </a:p>
+          <a:p>
+            <a:pPr>
+              <a:spcAft>
+                <a:spcPts val="600"/>
+              </a:spcAft>
+            </a:pPr>
+            <a:r>
+              <a:rPr sz="1500">
+                <a:solidFill>
+                  <a:srgbClr val="22282E"/>
+                </a:solidFill>
+              </a:rPr>
+              <a:t>•  ❓ ¿El CISSP sirve sin experiencia?</a:t>
+            </a:r>
+          </a:p>
+          <a:p>
+            <a:pPr>
+              <a:spcAft>
+                <a:spcPts val="600"/>
+              </a:spcAft>
+            </a:pPr>
+            <a:r>
+              <a:rPr sz="1500">
+                <a:solidFill>
+                  <a:srgbClr val="22282E"/>
+                </a:solidFill>
+              </a:rPr>
+              <a:t>•  Puedes aprobar el examen, pero sin 5 años de experiencia serás Associate of (ISC)² hasta cumplirlos.</a:t>
+            </a:r>
+          </a:p>
+          <a:p>
+            <a:pPr>
+              <a:spcAft>
+                <a:spcPts val="600"/>
+              </a:spcAft>
+            </a:pPr>
+            <a:r>
+              <a:rPr sz="1500">
+                <a:solidFill>
+                  <a:srgbClr val="22282E"/>
+                </a:solidFill>
+              </a:rPr>
+              <a:t>•  ❓ ¿Cuánto se tarda en el OSCP?</a:t>
+            </a:r>
+          </a:p>
+          <a:p>
+            <a:pPr>
+              <a:spcAft>
+                <a:spcPts val="600"/>
+              </a:spcAft>
+            </a:pPr>
+            <a:r>
+              <a:rPr sz="1500">
+                <a:solidFill>
+                  <a:srgbClr val="22282E"/>
+                </a:solidFill>
+              </a:rPr>
+              <a:t>•  Con base previa, 3–6 meses de práctica intensiva. Sin base, más. Depende de tu dominio de las Partes 6–9.</a:t>
+            </a:r>
+          </a:p>
+          <a:p>
+            <a:pPr>
+              <a:spcAft>
+                <a:spcPts val="600"/>
+              </a:spcAft>
+            </a:pPr>
+            <a:r>
+              <a:rPr sz="1500">
+                <a:solidFill>
+                  <a:srgbClr val="22282E"/>
+                </a:solidFill>
+              </a:rPr>
+              <a:t>•  ❓ ¿Las certificaciones caducan?</a:t>
+            </a:r>
+          </a:p>
+        </p:txBody>
+      </p:sp>
+    </p:spTree>
+  </p:cSld>
+  <p:clrMapOvr>
+    <a:masterClrMapping/>
+  </p:clrMapOvr>
+</p:sld>
+</file>
+
+<file path=ppt/slides/slide15.xml><?xml version="1.0" encoding="utf-8"?>
+<p:sld xmlns:a="http://schemas.openxmlformats.org/drawingml/2006/main" xmlns:p="http://schemas.openxmlformats.org/presentationml/2006/main" xmlns:r="http://schemas.openxmlformats.org/officeDocument/2006/relationships">
+  <p:cSld>
+    <p:spTree>
+      <p:nvGrpSpPr>
+        <p:cNvPr id="1" name=""/>
+        <p:cNvGrpSpPr/>
+        <p:nvPr/>
+      </p:nvGrpSpPr>
+      <p:grpSpPr/>
+      <p:sp>
+        <p:nvSpPr>
+          <p:cNvPr id="2" name="TextBox 1"/>
+          <p:cNvSpPr txBox="1"/>
+          <p:nvPr/>
+        </p:nvSpPr>
+        <p:spPr>
+          <a:xfrm>
+            <a:off x="457200" y="320040"/>
+            <a:ext cx="8229600" cy="822960"/>
+          </a:xfrm>
+          <a:prstGeom prst="rect">
+            <a:avLst/>
+          </a:prstGeom>
+          <a:noFill/>
+        </p:spPr>
+        <p:txBody>
+          <a:bodyPr wrap="square">
+            <a:spAutoFit/>
+          </a:bodyPr>
+          <a:lstStyle/>
+          <a:p>
+            <a:r>
+              <a:rPr sz="2600" b="1">
+                <a:solidFill>
+                  <a:srgbClr val="0B3D2E"/>
+                </a:solidFill>
+              </a:rPr>
+              <a:t>🔗 Referencias</a:t>
+            </a:r>
+          </a:p>
+        </p:txBody>
+      </p:sp>
+      <p:sp>
+        <p:nvSpPr>
+          <p:cNvPr id="3" name="TextBox 2"/>
+          <p:cNvSpPr txBox="1"/>
+          <p:nvPr/>
+        </p:nvSpPr>
+        <p:spPr>
+          <a:xfrm>
+            <a:off x="457200" y="1280160"/>
+            <a:ext cx="8229600" cy="4937760"/>
+          </a:xfrm>
+          <a:prstGeom prst="rect">
+            <a:avLst/>
+          </a:prstGeom>
+          <a:noFill/>
+        </p:spPr>
+        <p:txBody>
+          <a:bodyPr wrap="square">
+            <a:spAutoFit/>
+          </a:bodyPr>
+          <a:lstStyle/>
+          <a:p>
+            <a:pPr>
+              <a:spcAft>
+                <a:spcPts val="600"/>
+              </a:spcAft>
+            </a:pPr>
+            <a:r>
+              <a:rPr sz="1500">
+                <a:solidFill>
+                  <a:srgbClr val="22282E"/>
+                </a:solidFill>
+              </a:rPr>
               <a:t>•  CompTIA Certification Roadmap: &lt;https://www.comptia.org/certifications&gt;</a:t>
             </a:r>
           </a:p>
@@ -3629,6 +4080,81 @@
           </a:p>
         </p:txBody>
       </p:sp>
+    </p:spTree>
+  </p:cSld>
+  <p:clrMapOvr>
+    <a:masterClrMapping/>
+  </p:clrMapOvr>
+</p:sld>
+</file>
+
+<file path=ppt/slides/slide16.xml><?xml version="1.0" encoding="utf-8"?>
+<p:sld xmlns:a="http://schemas.openxmlformats.org/drawingml/2006/main" xmlns:p="http://schemas.openxmlformats.org/presentationml/2006/main" xmlns:r="http://schemas.openxmlformats.org/officeDocument/2006/relationships">
+  <p:cSld>
+    <p:spTree>
+      <p:nvGrpSpPr>
+        <p:cNvPr id="1" name=""/>
+        <p:cNvGrpSpPr/>
+        <p:nvPr/>
+      </p:nvGrpSpPr>
+      <p:grpSpPr/>
+      <p:sp>
+        <p:nvSpPr>
+          <p:cNvPr id="2" name="TextBox 1"/>
+          <p:cNvSpPr txBox="1"/>
+          <p:nvPr/>
+        </p:nvSpPr>
+        <p:spPr>
+          <a:xfrm>
+            <a:off x="457200" y="274320"/>
+            <a:ext cx="8229600" cy="640080"/>
+          </a:xfrm>
+          <a:prstGeom prst="rect">
+            <a:avLst/>
+          </a:prstGeom>
+          <a:noFill/>
+        </p:spPr>
+        <p:txBody>
+          <a:bodyPr wrap="square">
+            <a:spAutoFit/>
+          </a:bodyPr>
+          <a:lstStyle/>
+          <a:p>
+            <a:r>
+              <a:rPr sz="2200" b="1">
+                <a:solidFill>
+                  <a:srgbClr val="0B3D2E"/>
+                </a:solidFill>
+              </a:rPr>
+              <a:t>Diagrama de la clase</a:t>
+            </a:r>
+          </a:p>
+        </p:txBody>
+      </p:sp>
+      <p:pic>
+        <p:nvPicPr>
+          <p:cNvPr id="3" name="Picture 2" descr="140d8033f8ec6c0f.png"/>
+          <p:cNvPicPr>
+            <a:picLocks noChangeAspect="1"/>
+          </p:cNvPicPr>
+          <p:nvPr/>
+        </p:nvPicPr>
+        <p:blipFill>
+          <a:blip r:embed="rId2"/>
+          <a:stretch>
+            <a:fillRect/>
+          </a:stretch>
+        </p:blipFill>
+        <p:spPr>
+          <a:xfrm>
+            <a:off x="457200" y="3250708"/>
+            <a:ext cx="8229600" cy="996664"/>
+          </a:xfrm>
+          <a:prstGeom prst="rect">
+            <a:avLst/>
+          </a:prstGeom>
+        </p:spPr>
+      </p:pic>
     </p:spTree>
   </p:cSld>
   <p:clrMapOvr>
@@ -3713,7 +4239,7 @@
                   <a:srgbClr val="22282E"/>
                 </a:solidFill>
               </a:rPr>
-              <a:t>•  Que el alumno construya un roadmap de certificaciones personalizado, entendiendo qué credencial demuestra qué competencia, cuál es el orden lógico según su perfil (ofensivo, defensivo o de gestión), y cuánto cuesta en dinero, tiempo y esfuerzo. Al final tendrás un plan escrito con hitos concretos alineado a tu objetivo profesional y a las clases ya cursadas del programa.</a:t>
+              <a:t>•  Que el alumno construya un roadmap de certificaciones personalizado, entendiendo qué credencial demuestra qué competencia, cuál es el orden lógico según su perfil (ofensivo, defensivo o de gestión)…</a:t>
             </a:r>
           </a:p>
         </p:txBody>
@@ -4107,7 +4633,7 @@
                   <a:srgbClr val="0B3D2E"/>
                 </a:solidFill>
               </a:rPr>
-              <a:t>📖 Definiciones y características</a:t>
+              <a:t>🧠 Explicación en profundidad</a:t>
             </a:r>
           </a:p>
         </p:txBody>
@@ -4145,82 +4671,22 @@
                   <a:srgbClr val="22282E"/>
                 </a:solidFill>
               </a:rPr>
-              <a:t>•  Certificación baseline: credencial de nivel de entrada (p. ej. Security+). Característica: amplia y teórica, abre el mercado laboral inicial.</a:t>
-            </a:r>
-          </a:p>
-          <a:p>
-            <a:pPr>
-              <a:spcAft>
-                <a:spcPts val="600"/>
-              </a:spcAft>
-            </a:pPr>
-            <a:r>
-              <a:rPr sz="1500">
-                <a:solidFill>
-                  <a:srgbClr val="22282E"/>
-                </a:solidFill>
-              </a:rPr>
-              <a:t>•  Certificación hands-on: examen práctico en laboratorio real (OSCP, OSEP). Característica: exige comprometer máquinas y entregar informe, no test de opción múltiple.</a:t>
-            </a:r>
-          </a:p>
-          <a:p>
-            <a:pPr>
-              <a:spcAft>
-                <a:spcPts val="600"/>
-              </a:spcAft>
-            </a:pPr>
-            <a:r>
-              <a:rPr sz="1500">
-                <a:solidFill>
-                  <a:srgbClr val="22282E"/>
-                </a:solidFill>
-              </a:rPr>
-              <a:t>•  CEU (Continuing Education Unit): crédito para renovar certificaciones de (ISC)²/ISACA sin reexaminarse. Característica: obliga a formación continua.</a:t>
-            </a:r>
-          </a:p>
-          <a:p>
-            <a:pPr>
-              <a:spcAft>
-                <a:spcPts val="600"/>
-              </a:spcAft>
-            </a:pPr>
-            <a:r>
-              <a:rPr sz="1500">
-                <a:solidFill>
-                  <a:srgbClr val="22282E"/>
-                </a:solidFill>
-              </a:rPr>
-              <a:t>•  DoD 8570/8140: marco del gobierno de EE. UU. que exige ciertas certificaciones por rol. Característica: hace de Security+ un requisito frecuente.</a:t>
-            </a:r>
-          </a:p>
-          <a:p>
-            <a:pPr>
-              <a:spcAft>
-                <a:spcPts val="600"/>
-              </a:spcAft>
-            </a:pPr>
-            <a:r>
-              <a:rPr sz="1500">
-                <a:solidFill>
-                  <a:srgbClr val="22282E"/>
-                </a:solidFill>
-              </a:rPr>
-              <a:t>•  CBK (Common Body of Knowledge): temario canónico de (ISC)² para el CISSP. Característica: organizado en 8 dominios.</a:t>
-            </a:r>
-          </a:p>
-          <a:p>
-            <a:pPr>
-              <a:spcAft>
-                <a:spcPts val="600"/>
-              </a:spcAft>
-            </a:pPr>
-            <a:r>
-              <a:rPr sz="1500">
-                <a:solidFill>
-                  <a:srgbClr val="22282E"/>
-                </a:solidFill>
-              </a:rPr>
-              <a:t>•  Endorsement: aval de experiencia requerido tras aprobar el CISSP. Característica: sin él, quedas como Associate of (ISC)².</a:t>
+              <a:t>•  Una ruta de certificación parte del rol y de evidencia diagnóstica, no del prestigio de una sigla. La clase convierte el objetivo en una evidencia evaluable, declara supuestos y reserva tiempo para…</a:t>
+            </a:r>
+          </a:p>
+          <a:p>
+            <a:pPr>
+              <a:spcAft>
+                <a:spcPts val="600"/>
+              </a:spcAft>
+            </a:pPr>
+            <a:r>
+              <a:rPr sz="1500">
+                <a:solidFill>
+                  <a:srgbClr val="22282E"/>
+                </a:solidFill>
+              </a:rPr>
+              <a:t>•  Dos credenciales cubren temas parecidos pero una exige experiencia. El alumno compara objetivos oficiales, elegibilidad, formato y coste total antes de decidir.</a:t>
             </a:r>
           </a:p>
         </p:txBody>
@@ -4271,7 +4737,7 @@
                   <a:srgbClr val="0B3D2E"/>
                 </a:solidFill>
               </a:rPr>
-              <a:t>🧰 Herramientas y preparación</a:t>
+              <a:t>📔 Glosario operativo</a:t>
             </a:r>
           </a:p>
         </p:txBody>
@@ -4309,67 +4775,52 @@
                   <a:srgbClr val="22282E"/>
                 </a:solidFill>
               </a:rPr>
-              <a:t>•  No hay laboratorio ofensivo aquí; el "entorno" es tu planificación. Necesitas:</a:t>
-            </a:r>
-          </a:p>
-          <a:p>
-            <a:pPr>
-              <a:spcAft>
-                <a:spcPts val="600"/>
-              </a:spcAft>
-            </a:pPr>
-            <a:r>
-              <a:rPr sz="1500">
-                <a:solidFill>
-                  <a:srgbClr val="22282E"/>
-                </a:solidFill>
-              </a:rPr>
-              <a:t>•  Una hoja de cálculo (LibreOffice Calc / Google Sheets) para el roadmap y presupuesto.</a:t>
-            </a:r>
-          </a:p>
-          <a:p>
-            <a:pPr>
-              <a:spcAft>
-                <a:spcPts val="600"/>
-              </a:spcAft>
-            </a:pPr>
-            <a:r>
-              <a:rPr sz="1500">
-                <a:solidFill>
-                  <a:srgbClr val="22282E"/>
-                </a:solidFill>
-              </a:rPr>
-              <a:t>•  Las páginas oficiales de cada proveedor (CompTIA, Offensive Security, (ISC)², ISACA, SANS/GIAC).</a:t>
-            </a:r>
-          </a:p>
-          <a:p>
-            <a:pPr>
-              <a:spcAft>
-                <a:spcPts val="600"/>
-              </a:spcAft>
-            </a:pPr>
-            <a:r>
-              <a:rPr sz="1500">
-                <a:solidFill>
-                  <a:srgbClr val="22282E"/>
-                </a:solidFill>
-              </a:rPr>
-              <a:t>•  Tu registro de progreso de las Partes 1–15 para saber qué ya dominas.</a:t>
-            </a:r>
-          </a:p>
-          <a:p>
-            <a:pPr>
-              <a:spcAft>
-                <a:spcPts val="600"/>
-              </a:spcAft>
-            </a:pPr>
-            <a:r>
-              <a:rPr sz="1500">
-                <a:solidFill>
-                  <a:srgbClr val="22282E"/>
-                </a:solidFill>
-              </a:rPr>
-              <a:t>•  Un calendario para fijar fechas de examen realistas.</a:t>
+              <a:t>•  Término — Definición</a:t>
+            </a:r>
+          </a:p>
+          <a:p>
+            <a:pPr>
+              <a:spcAft>
+                <a:spcPts val="600"/>
+              </a:spcAft>
+            </a:pPr>
+            <a:r>
+              <a:rPr sz="1500">
+                <a:solidFill>
+                  <a:srgbClr val="22282E"/>
+                </a:solidFill>
+              </a:rPr>
+              <a:t>•  Blueprint — Temario oficial vigente del examen.</a:t>
+            </a:r>
+          </a:p>
+          <a:p>
+            <a:pPr>
+              <a:spcAft>
+                <a:spcPts val="600"/>
+              </a:spcAft>
+            </a:pPr>
+            <a:r>
+              <a:rPr sz="1500">
+                <a:solidFill>
+                  <a:srgbClr val="22282E"/>
+                </a:solidFill>
+              </a:rPr>
+              <a:t>•  Evidencia — Resultado que otra persona puede revisar y relacionar con un criterio.</a:t>
+            </a:r>
+          </a:p>
+          <a:p>
+            <a:pPr>
+              <a:spcAft>
+                <a:spcPts val="600"/>
+              </a:spcAft>
+            </a:pPr>
+            <a:r>
+              <a:rPr sz="1500">
+                <a:solidFill>
+                  <a:srgbClr val="22282E"/>
+                </a:solidFill>
+              </a:rPr>
+              <a:t>•  Retrospectiva — Revisión de decisiones, límites y siguiente mejora.</a:t>
             </a:r>
           </a:p>
         </p:txBody>
@@ -4420,7 +4871,7 @@
                   <a:srgbClr val="0B3D2E"/>
                 </a:solidFill>
               </a:rPr>
-              <a:t>🧪 Laboratorio guiado (ejercicio aplicado)</a:t>
+              <a:t>✅ Criterio de dominio</a:t>
             </a:r>
           </a:p>
         </p:txBody>
@@ -4458,97 +4909,7 @@
                   <a:srgbClr val="22282E"/>
                 </a:solidFill>
               </a:rPr>
-              <a:t>•  Autoevaluación de perfil. Responde: ¿te atrae más romper (ofensivo), defender (defensivo) o gobernar (GRC)? Anota tu objetivo de rol a 24 meses (p. ej. "Pentester junior", "Analista SOC", "GRC analyst").</a:t>
-            </a:r>
-          </a:p>
-          <a:p>
-            <a:pPr>
-              <a:spcAft>
-                <a:spcPts val="600"/>
-              </a:spcAft>
-            </a:pPr>
-            <a:r>
-              <a:rPr sz="1500">
-                <a:solidFill>
-                  <a:srgbClr val="22282E"/>
-                </a:solidFill>
-              </a:rPr>
-              <a:t>•  Inventario de base. Marca en una tabla qué partes del programa cubres bien. Ejemplo: Partes 6–9 fuertes → perfil ofensivo maduro.</a:t>
-            </a:r>
-          </a:p>
-          <a:p>
-            <a:pPr>
-              <a:spcAft>
-                <a:spcPts val="600"/>
-              </a:spcAft>
-            </a:pPr>
-            <a:r>
-              <a:rPr sz="1500">
-                <a:solidFill>
-                  <a:srgbClr val="22282E"/>
-                </a:solidFill>
-              </a:rPr>
-              <a:t>•  Selecciona la secuencia base. Si partes de cero laboral, empieza por Security+ (valida Partes 1–5). Si ya tienes base sólida, puedes saltar a la vía especializada.</a:t>
-            </a:r>
-          </a:p>
-          <a:p>
-            <a:pPr>
-              <a:spcAft>
-                <a:spcPts val="600"/>
-              </a:spcAft>
-            </a:pPr>
-            <a:r>
-              <a:rPr sz="1500">
-                <a:solidFill>
-                  <a:srgbClr val="22282E"/>
-                </a:solidFill>
-              </a:rPr>
-              <a:t>•  Define la vía especializada:</a:t>
-            </a:r>
-          </a:p>
-          <a:p>
-            <a:pPr>
-              <a:spcAft>
-                <a:spcPts val="600"/>
-              </a:spcAft>
-            </a:pPr>
-            <a:r>
-              <a:rPr sz="1500">
-                <a:solidFill>
-                  <a:srgbClr val="22282E"/>
-                </a:solidFill>
-              </a:rPr>
-              <a:t>•  Ofensiva: eJPT → OSCP → OSEP/OSWE (apoyada en Partes 6–9).</a:t>
-            </a:r>
-          </a:p>
-          <a:p>
-            <a:pPr>
-              <a:spcAft>
-                <a:spcPts val="600"/>
-              </a:spcAft>
-            </a:pPr>
-            <a:r>
-              <a:rPr sz="1500">
-                <a:solidFill>
-                  <a:srgbClr val="22282E"/>
-                </a:solidFill>
-              </a:rPr>
-              <a:t>•  Defensiva: CySA+ → GCIH/GCFA (apoyada en Partes 10–13).</a:t>
-            </a:r>
-          </a:p>
-          <a:p>
-            <a:pPr>
-              <a:spcAft>
-                <a:spcPts val="600"/>
-              </a:spcAft>
-            </a:pPr>
-            <a:r>
-              <a:rPr sz="1500">
-                <a:solidFill>
-                  <a:srgbClr val="22282E"/>
-                </a:solidFill>
-              </a:rPr>
-              <a:t>•  Gestión: CISSP (requiere 5 años de experiencia; apoyada transversalmente).</a:t>
+              <a:t>•  El alumno domina la clase cuando planifica, ejecuta y comunica una evidencia completa, respeta alcance y puede defender sus decisiones ante una revisión.</a:t>
             </a:r>
           </a:p>
         </p:txBody>
@@ -4599,7 +4960,7 @@
                   <a:srgbClr val="0B3D2E"/>
                 </a:solidFill>
               </a:rPr>
-              <a:t>✍️ Ejercicios</a:t>
+              <a:t>📖 Definiciones y características</a:t>
             </a:r>
           </a:p>
         </p:txBody>
@@ -4637,82 +4998,82 @@
                   <a:srgbClr val="22282E"/>
                 </a:solidFill>
               </a:rPr>
-              <a:t>•  Construye una tabla de 8 certificaciones con: dominio, nivel, tipo de examen y vigencia.</a:t>
-            </a:r>
-          </a:p>
-          <a:p>
-            <a:pPr>
-              <a:spcAft>
-                <a:spcPts val="600"/>
-              </a:spcAft>
-            </a:pPr>
-            <a:r>
-              <a:rPr sz="1500">
-                <a:solidFill>
-                  <a:srgbClr val="22282E"/>
-                </a:solidFill>
-              </a:rPr>
-              <a:t>•  Ordena tres rutas (ofensiva, defensiva, GRC) de menor a mayor dificultad.</a:t>
-            </a:r>
-          </a:p>
-          <a:p>
-            <a:pPr>
-              <a:spcAft>
-                <a:spcPts val="600"/>
-              </a:spcAft>
-            </a:pPr>
-            <a:r>
-              <a:rPr sz="1500">
-                <a:solidFill>
-                  <a:srgbClr val="22282E"/>
-                </a:solidFill>
-              </a:rPr>
-              <a:t>•  Calcula el presupuesto total de tu vía elegida a 24 meses.</a:t>
-            </a:r>
-          </a:p>
-          <a:p>
-            <a:pPr>
-              <a:spcAft>
-                <a:spcPts val="600"/>
-              </a:spcAft>
-            </a:pPr>
-            <a:r>
-              <a:rPr sz="1500">
-                <a:solidFill>
-                  <a:srgbClr val="22282E"/>
-                </a:solidFill>
-              </a:rPr>
-              <a:t>•  Mapea cada certificación de tu ruta a las partes del programa que la sustentan.</a:t>
-            </a:r>
-          </a:p>
-          <a:p>
-            <a:pPr>
-              <a:spcAft>
-                <a:spcPts val="600"/>
-              </a:spcAft>
-            </a:pPr>
-            <a:r>
-              <a:rPr sz="1500">
-                <a:solidFill>
-                  <a:srgbClr val="22282E"/>
-                </a:solidFill>
-              </a:rPr>
-              <a:t>•  Identifica dos certificaciones cloud y a qué rol apuntan.</a:t>
-            </a:r>
-          </a:p>
-          <a:p>
-            <a:pPr>
-              <a:spcAft>
-                <a:spcPts val="600"/>
-              </a:spcAft>
-            </a:pPr>
-            <a:r>
-              <a:rPr sz="1500">
-                <a:solidFill>
-                  <a:srgbClr val="22282E"/>
-                </a:solidFill>
-              </a:rPr>
-              <a:t>•  Redacta un párrafo justificando por qué tu primera certificación es la correcta para ti.</a:t>
+              <a:t>•  Certificación baseline: credencial de nivel de entrada (p. ej. Security+). Característica: amplia y teórica, abre el mercado laboral inicial.</a:t>
+            </a:r>
+          </a:p>
+          <a:p>
+            <a:pPr>
+              <a:spcAft>
+                <a:spcPts val="600"/>
+              </a:spcAft>
+            </a:pPr>
+            <a:r>
+              <a:rPr sz="1500">
+                <a:solidFill>
+                  <a:srgbClr val="22282E"/>
+                </a:solidFill>
+              </a:rPr>
+              <a:t>•  Certificación hands-on: examen práctico en laboratorio real (OSCP, OSEP). Característica: exige comprometer máquinas y entregar informe, no test de opción múltiple.</a:t>
+            </a:r>
+          </a:p>
+          <a:p>
+            <a:pPr>
+              <a:spcAft>
+                <a:spcPts val="600"/>
+              </a:spcAft>
+            </a:pPr>
+            <a:r>
+              <a:rPr sz="1500">
+                <a:solidFill>
+                  <a:srgbClr val="22282E"/>
+                </a:solidFill>
+              </a:rPr>
+              <a:t>•  CEU (Continuing Education Unit): crédito para renovar certificaciones de (ISC)²/ISACA sin reexaminarse. Característica: obliga a formación continua.</a:t>
+            </a:r>
+          </a:p>
+          <a:p>
+            <a:pPr>
+              <a:spcAft>
+                <a:spcPts val="600"/>
+              </a:spcAft>
+            </a:pPr>
+            <a:r>
+              <a:rPr sz="1500">
+                <a:solidFill>
+                  <a:srgbClr val="22282E"/>
+                </a:solidFill>
+              </a:rPr>
+              <a:t>•  DoD 8570/8140: marco del gobierno de EE. UU. que exige ciertas certificaciones por rol. Característica: hace de Security+ un requisito frecuente.</a:t>
+            </a:r>
+          </a:p>
+          <a:p>
+            <a:pPr>
+              <a:spcAft>
+                <a:spcPts val="600"/>
+              </a:spcAft>
+            </a:pPr>
+            <a:r>
+              <a:rPr sz="1500">
+                <a:solidFill>
+                  <a:srgbClr val="22282E"/>
+                </a:solidFill>
+              </a:rPr>
+              <a:t>•  CBK (Common Body of Knowledge): temario canónico de (ISC)² para el CISSP. Característica: organizado en 8 dominios.</a:t>
+            </a:r>
+          </a:p>
+          <a:p>
+            <a:pPr>
+              <a:spcAft>
+                <a:spcPts val="600"/>
+              </a:spcAft>
+            </a:pPr>
+            <a:r>
+              <a:rPr sz="1500">
+                <a:solidFill>
+                  <a:srgbClr val="22282E"/>
+                </a:solidFill>
+              </a:rPr>
+              <a:t>•  Endorsement: aval de experiencia requerido tras aprobar el CISSP. Característica: sin él, quedas como Associate of (ISC)².</a:t>
             </a:r>
           </a:p>
         </p:txBody>
@@ -4763,7 +5124,7 @@
                   <a:srgbClr val="0B3D2E"/>
                 </a:solidFill>
               </a:rPr>
-              <a:t>📝 Reto verificable</a:t>
+              <a:t>🧰 Herramientas y preparación</a:t>
             </a:r>
           </a:p>
         </p:txBody>
@@ -4801,22 +5162,67 @@
                   <a:srgbClr val="22282E"/>
                 </a:solidFill>
               </a:rPr>
-              <a:t>•  Entrega un documento roadmap-certificaciones.md con: (a) tu objetivo de rol a 24 meses, (b) una secuencia ordenada de 3–5 certificaciones con fechas trimestrales, (c) presupuesto total y (d) el mapeo de cada certificación a partes del programa.</a:t>
-            </a:r>
-          </a:p>
-          <a:p>
-            <a:pPr>
-              <a:spcAft>
-                <a:spcPts val="600"/>
-              </a:spcAft>
-            </a:pPr>
-            <a:r>
-              <a:rPr sz="1500">
-                <a:solidFill>
-                  <a:srgbClr val="22282E"/>
-                </a:solidFill>
-              </a:rPr>
-              <a:t>•  Criterio de aceptación: el roadmap tiene fechas concretas, la secuencia no salta niveles (no pones OSCP antes de tener base de Partes 6–8) y cada credencial está justificada con su parte de sustento.</a:t>
+              <a:t>•  No hay laboratorio ofensivo aquí; el "entorno" es tu planificación. Necesitas:</a:t>
+            </a:r>
+          </a:p>
+          <a:p>
+            <a:pPr>
+              <a:spcAft>
+                <a:spcPts val="600"/>
+              </a:spcAft>
+            </a:pPr>
+            <a:r>
+              <a:rPr sz="1500">
+                <a:solidFill>
+                  <a:srgbClr val="22282E"/>
+                </a:solidFill>
+              </a:rPr>
+              <a:t>•  Una hoja de cálculo (LibreOffice Calc / Google Sheets) para el roadmap y presupuesto.</a:t>
+            </a:r>
+          </a:p>
+          <a:p>
+            <a:pPr>
+              <a:spcAft>
+                <a:spcPts val="600"/>
+              </a:spcAft>
+            </a:pPr>
+            <a:r>
+              <a:rPr sz="1500">
+                <a:solidFill>
+                  <a:srgbClr val="22282E"/>
+                </a:solidFill>
+              </a:rPr>
+              <a:t>•  Las páginas oficiales de cada proveedor (CompTIA, Offensive Security, (ISC)², ISACA, SANS/GIAC).</a:t>
+            </a:r>
+          </a:p>
+          <a:p>
+            <a:pPr>
+              <a:spcAft>
+                <a:spcPts val="600"/>
+              </a:spcAft>
+            </a:pPr>
+            <a:r>
+              <a:rPr sz="1500">
+                <a:solidFill>
+                  <a:srgbClr val="22282E"/>
+                </a:solidFill>
+              </a:rPr>
+              <a:t>•  Tu registro de progreso de las Partes 1–15 para saber qué ya dominas.</a:t>
+            </a:r>
+          </a:p>
+          <a:p>
+            <a:pPr>
+              <a:spcAft>
+                <a:spcPts val="600"/>
+              </a:spcAft>
+            </a:pPr>
+            <a:r>
+              <a:rPr sz="1500">
+                <a:solidFill>
+                  <a:srgbClr val="22282E"/>
+                </a:solidFill>
+              </a:rPr>
+              <a:t>•  Un calendario para fijar fechas de examen realistas.</a:t>
             </a:r>
           </a:p>
         </p:txBody>
